--- a/media/resources/files/Onduktar_Sandardy_iReettoo_KondumA.pptx
+++ b/media/resources/files/Onduktar_Sandardy_iReettoo_KondumA.pptx
@@ -41182,7 +41182,7 @@
                 <a:ea typeface="+mn-ea"/>
                 <a:cs typeface="+mn-cs"/>
               </a:rPr>
-              <a:t>Турдуу пикирлер учун ыраазычылык билдиребиз.</a:t>
+              <a:t>Түрдүү пикирлер үчүн ыраазычылык билдиребиз.</a:t>
             </a:r>
           </a:p>
           <a:p>

--- a/media/resources/files/Onduktar_Sandardy_iReettoo_KondumA.pptx
+++ b/media/resources/files/Onduktar_Sandardy_iReettoo_KondumA.pptx
@@ -5299,7 +5299,7 @@
             <a:pPr algn="ctr"/>
             <a:r>
               <a:rPr lang="en-GB" sz="1200" b="1" dirty="0"/>
-              <a:t>3.52   </a:t>
+              <a:t>3,52   </a:t>
             </a:r>
             <a:r>
               <a:rPr lang="en-GB" sz="1200" dirty="0"/>
@@ -5307,7 +5307,7 @@
             </a:r>
             <a:r>
               <a:rPr lang="en-GB" sz="1200" b="1" dirty="0"/>
-              <a:t>   3.361</a:t>
+              <a:t>   3,361</a:t>
             </a:r>
           </a:p>
         </p:txBody>
@@ -7092,7 +7092,7 @@
             <a:pPr algn="ctr"/>
             <a:r>
               <a:rPr lang="en-GB" sz="1200" b="1" dirty="0"/>
-              <a:t>5.493   </a:t>
+              <a:t>5,493   </a:t>
             </a:r>
             <a:r>
               <a:rPr lang="en-GB" sz="1200" dirty="0"/>
@@ -7100,7 +7100,7 @@
             </a:r>
             <a:r>
               <a:rPr lang="en-GB" sz="1200" b="1" dirty="0"/>
-              <a:t>   5.506</a:t>
+              <a:t>   5,506</a:t>
             </a:r>
           </a:p>
         </p:txBody>
@@ -7690,7 +7690,7 @@
             <a:pPr algn="ctr"/>
             <a:r>
               <a:rPr lang="en-GB" sz="1200" b="1" dirty="0"/>
-              <a:t>4.405   </a:t>
+              <a:t>4,405   </a:t>
             </a:r>
             <a:r>
               <a:rPr lang="en-GB" sz="1200" dirty="0"/>
@@ -7698,7 +7698,7 @@
             </a:r>
             <a:r>
               <a:rPr lang="en-GB" sz="1200" b="1" dirty="0"/>
-              <a:t>   4.45</a:t>
+              <a:t>   4,45</a:t>
             </a:r>
           </a:p>
         </p:txBody>
@@ -8288,7 +8288,7 @@
             <a:pPr algn="ctr"/>
             <a:r>
               <a:rPr lang="en-GB" sz="1200" b="1" dirty="0"/>
-              <a:t>7.761   </a:t>
+              <a:t>7,761   </a:t>
             </a:r>
             <a:r>
               <a:rPr lang="en-GB" sz="1200" dirty="0"/>
@@ -8296,7 +8296,7 @@
             </a:r>
             <a:r>
               <a:rPr lang="en-GB" sz="1200" b="1" dirty="0"/>
-              <a:t>   7.76</a:t>
+              <a:t>   7,76</a:t>
             </a:r>
           </a:p>
         </p:txBody>
@@ -9113,7 +9113,7 @@
             <a:pPr algn="ctr"/>
             <a:r>
               <a:rPr lang="en-GB" sz="1200" b="1" dirty="0"/>
-              <a:t>8.204   </a:t>
+              <a:t>8,204   </a:t>
             </a:r>
             <a:r>
               <a:rPr lang="en-GB" sz="1200" dirty="0"/>
@@ -9121,7 +9121,7 @@
             </a:r>
             <a:r>
               <a:rPr lang="en-GB" sz="1200" b="1" dirty="0"/>
-              <a:t>   8.402   </a:t>
+              <a:t>   8,402   </a:t>
             </a:r>
             <a:r>
               <a:rPr lang="en-GB" sz="1200" dirty="0"/>
@@ -9129,7 +9129,7 @@
             </a:r>
             <a:r>
               <a:rPr lang="en-GB" sz="1200" b="1" dirty="0"/>
-              <a:t>   8.39</a:t>
+              <a:t>   8,39</a:t>
             </a:r>
           </a:p>
         </p:txBody>
@@ -9946,7 +9946,7 @@
             <a:pPr algn="ctr"/>
             <a:r>
               <a:rPr lang="en-GB" sz="1200" b="1" dirty="0"/>
-              <a:t>0.76   </a:t>
+              <a:t>0,76   </a:t>
             </a:r>
             <a:r>
               <a:rPr lang="en-GB" sz="1200" dirty="0"/>
@@ -9954,7 +9954,7 @@
             </a:r>
             <a:r>
               <a:rPr lang="en-GB" sz="1200" b="1" dirty="0"/>
-              <a:t>   0.607   </a:t>
+              <a:t>   0,607   </a:t>
             </a:r>
             <a:r>
               <a:rPr lang="en-GB" sz="1200" dirty="0"/>
@@ -9962,7 +9962,7 @@
             </a:r>
             <a:r>
               <a:rPr lang="en-GB" sz="1200" b="1" dirty="0"/>
-              <a:t>   0.706</a:t>
+              <a:t>   0,706</a:t>
             </a:r>
           </a:p>
         </p:txBody>
@@ -10074,7 +10074,7 @@
             </a:r>
             <a:r>
               <a:rPr lang="en-GB" sz="1200" dirty="0"/>
-              <a:t>)  7.6, 6.76, 7.66 </a:t>
+              <a:t>)  7,6, 6,76, 7,66 </a:t>
             </a:r>
           </a:p>
         </p:txBody>
@@ -10113,7 +10113,7 @@
             </a:r>
             <a:r>
               <a:rPr lang="en-GB" sz="1200" dirty="0"/>
-              <a:t>)  0.98, 0.809, 0.998, 0.898 </a:t>
+              <a:t>)  0,98, 0,809, 0,998, 0,898 </a:t>
             </a:r>
           </a:p>
         </p:txBody>
@@ -10152,7 +10152,7 @@
             </a:r>
             <a:r>
               <a:rPr lang="en-GB" sz="1200" dirty="0"/>
-              <a:t>)  1.202, 1.192, 1.2, 1.129 </a:t>
+              <a:t>)  1,202, 1,192, 1,2, 1,129 </a:t>
             </a:r>
           </a:p>
         </p:txBody>
@@ -10191,7 +10191,7 @@
             </a:r>
             <a:r>
               <a:rPr lang="en-GB" sz="1200" dirty="0"/>
-              <a:t>)  2.5, 5.12, 12.5 </a:t>
+              <a:t>)  2,5, 5,12, 12,5 </a:t>
             </a:r>
           </a:p>
         </p:txBody>
@@ -10230,7 +10230,7 @@
             </a:r>
             <a:r>
               <a:rPr lang="en-GB" sz="1200" dirty="0"/>
-              <a:t>)  3.4, 4.03, 0.43, 4.3 </a:t>
+              <a:t>)  3,4, 4,03, 0,43, 4,3 </a:t>
             </a:r>
           </a:p>
         </p:txBody>
@@ -10269,7 +10269,7 @@
             </a:r>
             <a:r>
               <a:rPr lang="en-GB" sz="1200" dirty="0"/>
-              <a:t>)  4.056, 4.605, 4.560, 4.650, </a:t>
+              <a:t>)  4,056, 4,605, 4,560, 4,650, </a:t>
             </a:r>
           </a:p>
         </p:txBody>
@@ -10308,7 +10308,7 @@
             </a:r>
             <a:r>
               <a:rPr lang="en-GB" sz="1200" dirty="0"/>
-              <a:t>)  12.546, 12.654, 12.56, 12.4, 12.564 </a:t>
+              <a:t>)  12,546, 12,654, 12,56, 12,4, 12,564 </a:t>
             </a:r>
           </a:p>
         </p:txBody>
@@ -10347,7 +10347,7 @@
             </a:r>
             <a:r>
               <a:rPr lang="en-GB" sz="1200" dirty="0"/>
-              <a:t>)  5.25, 5.205, 2.5 </a:t>
+              <a:t>)  5,25, 5,205, 2,5 </a:t>
             </a:r>
           </a:p>
         </p:txBody>
@@ -14827,7 +14827,7 @@
             <a:pPr algn="ctr"/>
             <a:r>
               <a:rPr lang="en-GB" sz="1200" b="1" dirty="0"/>
-              <a:t>3.52   </a:t>
+              <a:t>3,52   </a:t>
             </a:r>
             <a:r>
               <a:rPr lang="en-GB" sz="1200" dirty="0"/>
@@ -14835,7 +14835,7 @@
             </a:r>
             <a:r>
               <a:rPr lang="en-GB" sz="1200" b="1" dirty="0"/>
-              <a:t>   3.361</a:t>
+              <a:t>   3,361</a:t>
             </a:r>
           </a:p>
         </p:txBody>
@@ -14918,7 +14918,7 @@
             </a:r>
             <a:r>
               <a:rPr lang="en-GB" sz="1200" dirty="0"/>
-              <a:t>3.52</a:t>
+              <a:t>3,52</a:t>
             </a:r>
           </a:p>
         </p:txBody>
@@ -16647,7 +16647,7 @@
             <a:pPr algn="ctr"/>
             <a:r>
               <a:rPr lang="en-GB" sz="1200" b="1" dirty="0"/>
-              <a:t>5.493   </a:t>
+              <a:t>5,493   </a:t>
             </a:r>
             <a:r>
               <a:rPr lang="en-GB" sz="1200" dirty="0"/>
@@ -16655,7 +16655,7 @@
             </a:r>
             <a:r>
               <a:rPr lang="en-GB" sz="1200" b="1" dirty="0"/>
-              <a:t>   5.506</a:t>
+              <a:t>   5,506</a:t>
             </a:r>
           </a:p>
         </p:txBody>
@@ -16694,7 +16694,7 @@
             </a:r>
             <a:r>
               <a:rPr lang="en-GB" sz="1200" dirty="0"/>
-              <a:t>5.506</a:t>
+              <a:t>5,506</a:t>
             </a:r>
           </a:p>
         </p:txBody>
@@ -17272,7 +17272,7 @@
             <a:pPr algn="ctr"/>
             <a:r>
               <a:rPr lang="en-GB" sz="1200" b="1" dirty="0"/>
-              <a:t>4.405   </a:t>
+              <a:t>4,405   </a:t>
             </a:r>
             <a:r>
               <a:rPr lang="en-GB" sz="1200" dirty="0"/>
@@ -17280,7 +17280,7 @@
             </a:r>
             <a:r>
               <a:rPr lang="en-GB" sz="1200" b="1" dirty="0"/>
-              <a:t>   4.45</a:t>
+              <a:t>   4,45</a:t>
             </a:r>
           </a:p>
         </p:txBody>
@@ -17319,7 +17319,7 @@
             </a:r>
             <a:r>
               <a:rPr lang="en-GB" sz="1200" dirty="0"/>
-              <a:t>4.45</a:t>
+              <a:t>4,45</a:t>
             </a:r>
           </a:p>
         </p:txBody>
@@ -17897,7 +17897,7 @@
             <a:pPr algn="ctr"/>
             <a:r>
               <a:rPr lang="en-GB" sz="1200" b="1" dirty="0"/>
-              <a:t>7.761   </a:t>
+              <a:t>7,761   </a:t>
             </a:r>
             <a:r>
               <a:rPr lang="en-GB" sz="1200" dirty="0"/>
@@ -17905,7 +17905,7 @@
             </a:r>
             <a:r>
               <a:rPr lang="en-GB" sz="1200" b="1" dirty="0"/>
-              <a:t>   7.76</a:t>
+              <a:t>   7,76</a:t>
             </a:r>
           </a:p>
         </p:txBody>
@@ -17944,7 +17944,7 @@
             </a:r>
             <a:r>
               <a:rPr lang="en-GB" sz="1200" dirty="0"/>
-              <a:t> 7.761</a:t>
+              <a:t> 7,761</a:t>
             </a:r>
           </a:p>
         </p:txBody>
@@ -18761,7 +18761,7 @@
             <a:pPr algn="ctr"/>
             <a:r>
               <a:rPr lang="en-GB" sz="1200" b="1" dirty="0"/>
-              <a:t>8.204   </a:t>
+              <a:t>8,204   </a:t>
             </a:r>
             <a:r>
               <a:rPr lang="en-GB" sz="1200" dirty="0"/>
@@ -18769,7 +18769,7 @@
             </a:r>
             <a:r>
               <a:rPr lang="en-GB" sz="1200" b="1" dirty="0"/>
-              <a:t>   8.402   </a:t>
+              <a:t>   8,402   </a:t>
             </a:r>
             <a:r>
               <a:rPr lang="en-GB" sz="1200" dirty="0"/>
@@ -18777,7 +18777,7 @@
             </a:r>
             <a:r>
               <a:rPr lang="en-GB" sz="1200" b="1" dirty="0"/>
-              <a:t>   8.39</a:t>
+              <a:t>   8,39</a:t>
             </a:r>
           </a:p>
         </p:txBody>
@@ -18816,7 +18816,7 @@
             </a:r>
             <a:r>
               <a:rPr lang="en-GB" sz="1200" dirty="0"/>
-              <a:t>8.402</a:t>
+              <a:t>8,402</a:t>
             </a:r>
           </a:p>
         </p:txBody>
@@ -19633,7 +19633,7 @@
             <a:pPr algn="ctr"/>
             <a:r>
               <a:rPr lang="en-GB" sz="1200" b="1" dirty="0"/>
-              <a:t>0.76   </a:t>
+              <a:t>0,76   </a:t>
             </a:r>
             <a:r>
               <a:rPr lang="en-GB" sz="1200" dirty="0"/>
@@ -19641,7 +19641,7 @@
             </a:r>
             <a:r>
               <a:rPr lang="en-GB" sz="1200" b="1" dirty="0"/>
-              <a:t>   0.607   </a:t>
+              <a:t>   0,607   </a:t>
             </a:r>
             <a:r>
               <a:rPr lang="en-GB" sz="1200" dirty="0"/>
@@ -19649,7 +19649,7 @@
             </a:r>
             <a:r>
               <a:rPr lang="en-GB" sz="1200" b="1" dirty="0"/>
-              <a:t>   0.706</a:t>
+              <a:t>   0,706</a:t>
             </a:r>
           </a:p>
         </p:txBody>
@@ -19688,7 +19688,7 @@
             </a:r>
             <a:r>
               <a:rPr lang="en-GB" sz="1200" dirty="0"/>
-              <a:t>0.76</a:t>
+              <a:t>0,76</a:t>
             </a:r>
           </a:p>
         </p:txBody>
@@ -19764,7 +19764,7 @@
             </a:r>
             <a:r>
               <a:rPr lang="en-GB" sz="1200" dirty="0"/>
-              <a:t>)  7.6, 6.76, 7.66 </a:t>
+              <a:t>)  7,6, 6,76, 7,66 </a:t>
             </a:r>
           </a:p>
         </p:txBody>
@@ -19803,7 +19803,7 @@
             </a:r>
             <a:r>
               <a:rPr lang="en-GB" sz="1200" dirty="0"/>
-              <a:t>)  0.98, 0.809, 0.998, 0.898 </a:t>
+              <a:t>)  0,98, 0,809, 0,998, 0,898 </a:t>
             </a:r>
           </a:p>
         </p:txBody>
@@ -19842,7 +19842,7 @@
             </a:r>
             <a:r>
               <a:rPr lang="en-GB" sz="1200" dirty="0"/>
-              <a:t>)  1.202, 1.192, 1.2, 1.129 </a:t>
+              <a:t>)  1,202, 1,192, 1,2, 1,129 </a:t>
             </a:r>
           </a:p>
         </p:txBody>
@@ -19881,7 +19881,7 @@
             </a:r>
             <a:r>
               <a:rPr lang="en-GB" sz="1200" dirty="0"/>
-              <a:t>)  2.5, 5.12, 12.5 </a:t>
+              <a:t>)  2,5, 5,12, 12,5 </a:t>
             </a:r>
           </a:p>
         </p:txBody>
@@ -19920,7 +19920,7 @@
             </a:r>
             <a:r>
               <a:rPr lang="en-GB" sz="1200" dirty="0"/>
-              <a:t>)  3.4, 4.03, 0.43, 4.3 </a:t>
+              <a:t>)  3,4, 4,03, 0,43, 4,3 </a:t>
             </a:r>
           </a:p>
         </p:txBody>
@@ -19959,7 +19959,7 @@
             </a:r>
             <a:r>
               <a:rPr lang="en-GB" sz="1200" dirty="0"/>
-              <a:t>)  4.056, 4.605, 4.560, 4.650, </a:t>
+              <a:t>)  4,056, 4,605, 4,560, 4,650, </a:t>
             </a:r>
           </a:p>
         </p:txBody>
@@ -19998,7 +19998,7 @@
             </a:r>
             <a:r>
               <a:rPr lang="en-GB" sz="1200" dirty="0"/>
-              <a:t>)  12.546, 12.654, 12.56, 12.4, 12.564 </a:t>
+              <a:t>)  12,546, 12,654, 12,56, 12,4, 12,564 </a:t>
             </a:r>
           </a:p>
         </p:txBody>
@@ -20037,7 +20037,7 @@
             </a:r>
             <a:r>
               <a:rPr lang="en-GB" sz="1200" dirty="0"/>
-              <a:t>)  5.25, 5.205, 2.5 </a:t>
+              <a:t>)  5,25, 5,205, 2,5 </a:t>
             </a:r>
           </a:p>
         </p:txBody>
@@ -25732,7 +25732,7 @@
             <a:pPr algn="ctr"/>
             <a:r>
               <a:rPr lang="en-GB" sz="1200" b="1" dirty="0"/>
-              <a:t>3.52   </a:t>
+              <a:t>3,52   </a:t>
             </a:r>
             <a:r>
               <a:rPr lang="en-GB" sz="1200" dirty="0"/>
@@ -25740,7 +25740,7 @@
             </a:r>
             <a:r>
               <a:rPr lang="en-GB" sz="1200" b="1" dirty="0"/>
-              <a:t>   3.361</a:t>
+              <a:t>   3,361</a:t>
             </a:r>
           </a:p>
         </p:txBody>
@@ -27513,7 +27513,7 @@
             <a:pPr algn="ctr"/>
             <a:r>
               <a:rPr lang="en-GB" sz="1200" b="1" dirty="0"/>
-              <a:t>5.493   </a:t>
+              <a:t>5,493   </a:t>
             </a:r>
             <a:r>
               <a:rPr lang="en-GB" sz="1200" dirty="0"/>
@@ -27521,7 +27521,7 @@
             </a:r>
             <a:r>
               <a:rPr lang="en-GB" sz="1200" b="1" dirty="0"/>
-              <a:t>   5.506</a:t>
+              <a:t>   5,506</a:t>
             </a:r>
           </a:p>
         </p:txBody>
@@ -28105,7 +28105,7 @@
             <a:pPr algn="ctr"/>
             <a:r>
               <a:rPr lang="en-GB" sz="1200" b="1" dirty="0"/>
-              <a:t>4.405   </a:t>
+              <a:t>4,405   </a:t>
             </a:r>
             <a:r>
               <a:rPr lang="en-GB" sz="1200" dirty="0"/>
@@ -28113,7 +28113,7 @@
             </a:r>
             <a:r>
               <a:rPr lang="en-GB" sz="1200" b="1" dirty="0"/>
-              <a:t>   4.45</a:t>
+              <a:t>   4,45</a:t>
             </a:r>
           </a:p>
         </p:txBody>
@@ -28697,7 +28697,7 @@
             <a:pPr algn="ctr"/>
             <a:r>
               <a:rPr lang="en-GB" sz="1200" b="1" dirty="0"/>
-              <a:t>7.761   </a:t>
+              <a:t>7,761   </a:t>
             </a:r>
             <a:r>
               <a:rPr lang="en-GB" sz="1200" dirty="0"/>
@@ -28705,7 +28705,7 @@
             </a:r>
             <a:r>
               <a:rPr lang="en-GB" sz="1200" b="1" dirty="0"/>
-              <a:t>   7.76</a:t>
+              <a:t>   7,76</a:t>
             </a:r>
           </a:p>
         </p:txBody>
@@ -29516,7 +29516,7 @@
             <a:pPr algn="ctr"/>
             <a:r>
               <a:rPr lang="en-GB" sz="1200" b="1" dirty="0"/>
-              <a:t>8.204   </a:t>
+              <a:t>8,204   </a:t>
             </a:r>
             <a:r>
               <a:rPr lang="en-GB" sz="1200" dirty="0"/>
@@ -29524,7 +29524,7 @@
             </a:r>
             <a:r>
               <a:rPr lang="en-GB" sz="1200" b="1" dirty="0"/>
-              <a:t>   8.402   </a:t>
+              <a:t>   8,402   </a:t>
             </a:r>
             <a:r>
               <a:rPr lang="en-GB" sz="1200" dirty="0"/>
@@ -29532,7 +29532,7 @@
             </a:r>
             <a:r>
               <a:rPr lang="en-GB" sz="1200" b="1" dirty="0"/>
-              <a:t>   8.39</a:t>
+              <a:t>   8,39</a:t>
             </a:r>
           </a:p>
         </p:txBody>
@@ -30343,7 +30343,7 @@
             <a:pPr algn="ctr"/>
             <a:r>
               <a:rPr lang="en-GB" sz="1200" b="1" dirty="0"/>
-              <a:t>0.76   </a:t>
+              <a:t>0,76   </a:t>
             </a:r>
             <a:r>
               <a:rPr lang="en-GB" sz="1200" dirty="0"/>
@@ -30351,7 +30351,7 @@
             </a:r>
             <a:r>
               <a:rPr lang="en-GB" sz="1200" b="1" dirty="0"/>
-              <a:t>   0.607   </a:t>
+              <a:t>   0,607   </a:t>
             </a:r>
             <a:r>
               <a:rPr lang="en-GB" sz="1200" dirty="0"/>
@@ -30359,7 +30359,7 @@
             </a:r>
             <a:r>
               <a:rPr lang="en-GB" sz="1200" b="1" dirty="0"/>
-              <a:t>   0.706</a:t>
+              <a:t>   0,706</a:t>
             </a:r>
           </a:p>
         </p:txBody>
@@ -30471,7 +30471,7 @@
             </a:r>
             <a:r>
               <a:rPr lang="en-GB" sz="1200" dirty="0"/>
-              <a:t>)  7.6, 6.76, 7.66 </a:t>
+              <a:t>)  7,6, 6,76, 7,66 </a:t>
             </a:r>
           </a:p>
         </p:txBody>
@@ -30510,7 +30510,7 @@
             </a:r>
             <a:r>
               <a:rPr lang="en-GB" sz="1200" dirty="0"/>
-              <a:t>)  0.98, 0.809, 0.998, 0.898 </a:t>
+              <a:t>)  0,98, 0,809, 0,998, 0,898 </a:t>
             </a:r>
           </a:p>
         </p:txBody>
@@ -30549,7 +30549,7 @@
             </a:r>
             <a:r>
               <a:rPr lang="en-GB" sz="1200" dirty="0"/>
-              <a:t>)  1.202, 1.192, 1.2, 1.129 </a:t>
+              <a:t>)  1,202, 1,192, 1,2, 1,129 </a:t>
             </a:r>
           </a:p>
         </p:txBody>
@@ -30588,7 +30588,7 @@
             </a:r>
             <a:r>
               <a:rPr lang="en-GB" sz="1200" dirty="0"/>
-              <a:t>)  2.5, 5.12, 12.5 </a:t>
+              <a:t>)  2,5, 5,12, 12,5 </a:t>
             </a:r>
           </a:p>
         </p:txBody>
@@ -30627,7 +30627,7 @@
             </a:r>
             <a:r>
               <a:rPr lang="en-GB" sz="1200" dirty="0"/>
-              <a:t>)  3.4, 4.03, 0.43, 4.3 </a:t>
+              <a:t>)  3,4, 4,03, 0,43, 4,3 </a:t>
             </a:r>
           </a:p>
         </p:txBody>
@@ -30666,7 +30666,7 @@
             </a:r>
             <a:r>
               <a:rPr lang="en-GB" sz="1200" dirty="0"/>
-              <a:t>)  4.056, 4.605, 4.560, 4.650, </a:t>
+              <a:t>)  4,056, 4,605, 4,560, 4,650, </a:t>
             </a:r>
           </a:p>
         </p:txBody>
@@ -30705,7 +30705,7 @@
             </a:r>
             <a:r>
               <a:rPr lang="en-GB" sz="1200" dirty="0"/>
-              <a:t>)  12.546, 12.654, 12.56, 12.4, 12.564 </a:t>
+              <a:t>)  12,546, 12,654, 12,56, 12,4, 12,564 </a:t>
             </a:r>
           </a:p>
         </p:txBody>
@@ -30744,7 +30744,7 @@
             </a:r>
             <a:r>
               <a:rPr lang="en-GB" sz="1200" dirty="0"/>
-              <a:t>)  5.25, 5.205, 2.5 </a:t>
+              <a:t>)  5,25, 5,205, 2,5 </a:t>
             </a:r>
           </a:p>
         </p:txBody>
@@ -34810,7 +34810,7 @@
             <a:pPr algn="ctr"/>
             <a:r>
               <a:rPr lang="en-GB" sz="1200" b="1" dirty="0"/>
-              <a:t>3.52   </a:t>
+              <a:t>3,52   </a:t>
             </a:r>
             <a:r>
               <a:rPr lang="en-GB" sz="1200" dirty="0"/>
@@ -34818,7 +34818,7 @@
             </a:r>
             <a:r>
               <a:rPr lang="en-GB" sz="1200" b="1" dirty="0"/>
-              <a:t>   3.361</a:t>
+              <a:t>   3,361</a:t>
             </a:r>
           </a:p>
         </p:txBody>
@@ -36603,7 +36603,7 @@
             <a:pPr algn="ctr"/>
             <a:r>
               <a:rPr lang="en-GB" sz="1200" b="1" dirty="0"/>
-              <a:t>5.493   </a:t>
+              <a:t>5,493   </a:t>
             </a:r>
             <a:r>
               <a:rPr lang="en-GB" sz="1200" dirty="0"/>
@@ -36611,7 +36611,7 @@
             </a:r>
             <a:r>
               <a:rPr lang="en-GB" sz="1200" b="1" dirty="0"/>
-              <a:t>   5.506</a:t>
+              <a:t>   5,506</a:t>
             </a:r>
           </a:p>
         </p:txBody>
@@ -37201,7 +37201,7 @@
             <a:pPr algn="ctr"/>
             <a:r>
               <a:rPr lang="en-GB" sz="1200" b="1" dirty="0"/>
-              <a:t>4.405   </a:t>
+              <a:t>4,405   </a:t>
             </a:r>
             <a:r>
               <a:rPr lang="en-GB" sz="1200" dirty="0"/>
@@ -37209,7 +37209,7 @@
             </a:r>
             <a:r>
               <a:rPr lang="en-GB" sz="1200" b="1" dirty="0"/>
-              <a:t>   4.45</a:t>
+              <a:t>   4,45</a:t>
             </a:r>
           </a:p>
         </p:txBody>
@@ -37799,7 +37799,7 @@
             <a:pPr algn="ctr"/>
             <a:r>
               <a:rPr lang="en-GB" sz="1200" b="1" dirty="0"/>
-              <a:t>7.761   </a:t>
+              <a:t>7,761   </a:t>
             </a:r>
             <a:r>
               <a:rPr lang="en-GB" sz="1200" dirty="0"/>
@@ -37807,7 +37807,7 @@
             </a:r>
             <a:r>
               <a:rPr lang="en-GB" sz="1200" b="1" dirty="0"/>
-              <a:t>   7.76</a:t>
+              <a:t>   7,76</a:t>
             </a:r>
           </a:p>
         </p:txBody>
@@ -38624,7 +38624,7 @@
             <a:pPr algn="ctr"/>
             <a:r>
               <a:rPr lang="en-GB" sz="1200" b="1" dirty="0"/>
-              <a:t>8.204   </a:t>
+              <a:t>8,204   </a:t>
             </a:r>
             <a:r>
               <a:rPr lang="en-GB" sz="1200" dirty="0"/>
@@ -38632,7 +38632,7 @@
             </a:r>
             <a:r>
               <a:rPr lang="en-GB" sz="1200" b="1" dirty="0"/>
-              <a:t>   8.402   </a:t>
+              <a:t>   8,402   </a:t>
             </a:r>
             <a:r>
               <a:rPr lang="en-GB" sz="1200" dirty="0"/>
@@ -38640,7 +38640,7 @@
             </a:r>
             <a:r>
               <a:rPr lang="en-GB" sz="1200" b="1" dirty="0"/>
-              <a:t>   8.39</a:t>
+              <a:t>   8,39</a:t>
             </a:r>
           </a:p>
         </p:txBody>
@@ -39457,7 +39457,7 @@
             <a:pPr algn="ctr"/>
             <a:r>
               <a:rPr lang="en-GB" sz="1200" b="1" dirty="0"/>
-              <a:t>0.76   </a:t>
+              <a:t>0,76   </a:t>
             </a:r>
             <a:r>
               <a:rPr lang="en-GB" sz="1200" dirty="0"/>
@@ -39465,7 +39465,7 @@
             </a:r>
             <a:r>
               <a:rPr lang="en-GB" sz="1200" b="1" dirty="0"/>
-              <a:t>   0.607   </a:t>
+              <a:t>   0,607   </a:t>
             </a:r>
             <a:r>
               <a:rPr lang="en-GB" sz="1200" dirty="0"/>
@@ -39473,7 +39473,7 @@
             </a:r>
             <a:r>
               <a:rPr lang="en-GB" sz="1200" b="1" dirty="0"/>
-              <a:t>   0.706</a:t>
+              <a:t>   0,706</a:t>
             </a:r>
           </a:p>
         </p:txBody>
@@ -39585,7 +39585,7 @@
             </a:r>
             <a:r>
               <a:rPr lang="en-GB" sz="1200" dirty="0"/>
-              <a:t>)  7.6, 6.76, 7.66 </a:t>
+              <a:t>)  7,6, 6,76, 7,66 </a:t>
             </a:r>
           </a:p>
         </p:txBody>
@@ -39624,7 +39624,7 @@
             </a:r>
             <a:r>
               <a:rPr lang="en-GB" sz="1200" dirty="0"/>
-              <a:t>)  0.98, 0.809, 0.998, 0.898 </a:t>
+              <a:t>)  0,98, 0,809, 0,998, 0,898 </a:t>
             </a:r>
           </a:p>
         </p:txBody>
@@ -39663,7 +39663,7 @@
             </a:r>
             <a:r>
               <a:rPr lang="en-GB" sz="1200" dirty="0"/>
-              <a:t>)  1.202, 1.192, 1.2, 1.129 </a:t>
+              <a:t>)  1,202, 1,192, 1,2, 1,129 </a:t>
             </a:r>
           </a:p>
         </p:txBody>
@@ -39702,7 +39702,7 @@
             </a:r>
             <a:r>
               <a:rPr lang="en-GB" sz="1200" dirty="0"/>
-              <a:t>)  2.5, 5.12, 12.5 </a:t>
+              <a:t>)  2,5, 5,12, 12,5 </a:t>
             </a:r>
           </a:p>
         </p:txBody>
@@ -39741,7 +39741,7 @@
             </a:r>
             <a:r>
               <a:rPr lang="en-GB" sz="1200" dirty="0"/>
-              <a:t>)  3.4, 4.03, 0.43, 4.3 </a:t>
+              <a:t>)  3,4, 4,03, 0,43, 4,3 </a:t>
             </a:r>
           </a:p>
         </p:txBody>
@@ -39780,7 +39780,7 @@
             </a:r>
             <a:r>
               <a:rPr lang="en-GB" sz="1200" dirty="0"/>
-              <a:t>)  4.056, 4.605, 4.560, 4.650, </a:t>
+              <a:t>)  4,056, 4,605, 4,560, 4,650, </a:t>
             </a:r>
           </a:p>
         </p:txBody>
@@ -39819,7 +39819,7 @@
             </a:r>
             <a:r>
               <a:rPr lang="en-GB" sz="1200" dirty="0"/>
-              <a:t>)  12.546, 12.654, 12.56, 12.4, 12.564 </a:t>
+              <a:t>)  12,546, 12,654, 12,56, 12,4, 12,564 </a:t>
             </a:r>
           </a:p>
         </p:txBody>
@@ -39858,7 +39858,7 @@
             </a:r>
             <a:r>
               <a:rPr lang="en-GB" sz="1200" dirty="0"/>
-              <a:t>)  5.25, 5.205, 2.5 </a:t>
+              <a:t>)  5,25, 5,205, 2,5 </a:t>
             </a:r>
           </a:p>
         </p:txBody>
